--- a/test/generator/baseline/gen.odp.to.pptx.pptx
+++ b/test/generator/baseline/gen.odp.to.pptx.pptx
@@ -403,9 +403,17 @@
           </a:p>
           <a:p>
             <a:pPr marL="228600" indent="-177800">
-              <a:buFont typeface="+mj-lt"/>
-              <a:buAutoNum type="arabicPeriod"/>
+              <a:buNone/>
             </a:pPr>
+            <a:r>
+              <a:rPr lang="en-US" sz="1200" dirty="0">
+                <a:solidFill>
+                  <a:srgbClr val="000000"/>
+                </a:solidFill>
+                <a:latin typeface="Calibri"/>
+              </a:rPr>
+              <a:t>1.	</a:t>
+            </a:r>
             <a:r>
               <a:rPr lang="en-US" sz="1200" dirty="0">
                 <a:solidFill>
@@ -419,9 +427,17 @@
           </a:p>
           <a:p>
             <a:pPr marL="228600" indent="-177800">
-              <a:buFont typeface="+mj-lt"/>
-              <a:buAutoNum type="arabicPeriod"/>
+              <a:buNone/>
             </a:pPr>
+            <a:r>
+              <a:rPr lang="en-US" sz="1200" dirty="0">
+                <a:solidFill>
+                  <a:srgbClr val="000000"/>
+                </a:solidFill>
+                <a:latin typeface="Calibri"/>
+              </a:rPr>
+              <a:t>2.	</a:t>
+            </a:r>
             <a:r>
               <a:rPr lang="en-US" sz="1200" dirty="0">
                 <a:solidFill>
@@ -568,7 +584,7 @@
             <a:off x="0" y="0"/>
             <a:ext cx="12192000" cy="6857365"/>
           </a:xfrm>
-          <a:prstGeom prst="non-primitive">
+          <a:prstGeom prst="rect">
             <a:avLst/>
           </a:prstGeom>
           <a:solidFill>
@@ -602,7 +618,7 @@
             <a:off x="0" y="1216660"/>
             <a:ext cx="195834" cy="673481"/>
           </a:xfrm>
-          <a:prstGeom prst="non-primitive">
+          <a:prstGeom prst="rect">
             <a:avLst/>
           </a:prstGeom>
           <a:solidFill>
@@ -636,7 +652,7 @@
             <a:off x="267843" y="1216660"/>
             <a:ext cx="195834" cy="673481"/>
           </a:xfrm>
-          <a:prstGeom prst="non-primitive">
+          <a:prstGeom prst="rect">
             <a:avLst/>
           </a:prstGeom>
           <a:solidFill>
@@ -670,7 +686,7 @@
             <a:off x="535686" y="1216660"/>
             <a:ext cx="195834" cy="673481"/>
           </a:xfrm>
-          <a:prstGeom prst="non-primitive">
+          <a:prstGeom prst="rect">
             <a:avLst/>
           </a:prstGeom>
           <a:solidFill>
@@ -704,7 +720,7 @@
             <a:off x="640080" y="613918"/>
             <a:ext cx="10907522" cy="1894078"/>
           </a:xfrm>
-          <a:prstGeom prst="non-primitive">
+          <a:prstGeom prst="rect">
             <a:avLst/>
           </a:prstGeom>
           <a:solidFill>
@@ -13741,7 +13757,7 @@
       </p:sp>
       <p:pic>
         <p:nvPicPr>
-          <p:cNvPr id="4" name="Picture 4"/>
+          <p:cNvPr id="4" name="Picture 4" descr="165 Inspirational Quotes To Keep You Motivated In Life"/>
           <p:cNvPicPr>
             <a:picLocks noChangeAspect="1"/>
           </p:cNvPicPr>
@@ -14011,9 +14027,17 @@
           </a:p>
           <a:p>
             <a:pPr marL="228600" indent="-177800">
-              <a:buFont typeface="+mj-lt"/>
-              <a:buAutoNum type="arabicPeriod"/>
+              <a:buNone/>
             </a:pPr>
+            <a:r>
+              <a:rPr lang="en-US" sz="1200" dirty="0">
+                <a:solidFill>
+                  <a:srgbClr val="000000"/>
+                </a:solidFill>
+                <a:latin typeface="Ubuntu"/>
+              </a:rPr>
+              <a:t>1.	</a:t>
+            </a:r>
             <a:r>
               <a:rPr lang="en-US" sz="1200" dirty="0">
                 <a:solidFill>
@@ -14027,9 +14051,17 @@
           </a:p>
           <a:p>
             <a:pPr marL="228600" indent="-177800">
-              <a:buFont typeface="+mj-lt"/>
-              <a:buAutoNum type="arabicPeriod"/>
+              <a:buNone/>
             </a:pPr>
+            <a:r>
+              <a:rPr lang="en-US" sz="1200" dirty="0">
+                <a:solidFill>
+                  <a:srgbClr val="000000"/>
+                </a:solidFill>
+                <a:latin typeface="Ubuntu"/>
+              </a:rPr>
+              <a:t>2.	</a:t>
+            </a:r>
             <a:r>
               <a:rPr lang="en-US" sz="1200" dirty="0">
                 <a:solidFill>
@@ -14084,9 +14116,17 @@
           </a:p>
           <a:p>
             <a:pPr marL="228600" indent="-177800">
-              <a:buFont typeface="+mj-lt"/>
-              <a:buAutoNum type="arabicPeriod"/>
+              <a:buNone/>
             </a:pPr>
+            <a:r>
+              <a:rPr lang="en-US" sz="1200" dirty="0">
+                <a:solidFill>
+                  <a:srgbClr val="000000"/>
+                </a:solidFill>
+                <a:latin typeface="Ubuntu"/>
+              </a:rPr>
+              <a:t>1.	</a:t>
+            </a:r>
             <a:r>
               <a:rPr lang="en-US" sz="1200" dirty="0">
                 <a:solidFill>
@@ -14100,9 +14140,17 @@
           </a:p>
           <a:p>
             <a:pPr marL="457200" indent="-177800" lvl="1">
-              <a:buFont typeface="+mj-lt"/>
-              <a:buAutoNum type="arabicPeriod"/>
+              <a:buNone/>
             </a:pPr>
+            <a:r>
+              <a:rPr lang="en-US" sz="1200" dirty="0">
+                <a:solidFill>
+                  <a:srgbClr val="000000"/>
+                </a:solidFill>
+                <a:latin typeface="Ubuntu"/>
+              </a:rPr>
+              <a:t>1.	</a:t>
+            </a:r>
             <a:r>
               <a:rPr lang="en-US" sz="1200" dirty="0">
                 <a:solidFill>
@@ -14116,9 +14164,17 @@
           </a:p>
           <a:p>
             <a:pPr marL="685800" indent="-177800" lvl="2">
-              <a:buFont typeface="+mj-lt"/>
-              <a:buAutoNum type="arabicPeriod"/>
+              <a:buNone/>
             </a:pPr>
+            <a:r>
+              <a:rPr lang="en-US" sz="1200" dirty="0">
+                <a:solidFill>
+                  <a:srgbClr val="000000"/>
+                </a:solidFill>
+                <a:latin typeface="Ubuntu"/>
+              </a:rPr>
+              <a:t>1.	</a:t>
+            </a:r>
             <a:r>
               <a:rPr lang="en-US" sz="1200" dirty="0">
                 <a:solidFill>
@@ -14132,9 +14188,17 @@
           </a:p>
           <a:p>
             <a:pPr marL="685800" indent="-177800" lvl="2">
-              <a:buFont typeface="+mj-lt"/>
-              <a:buAutoNum type="arabicPeriod"/>
+              <a:buNone/>
             </a:pPr>
+            <a:r>
+              <a:rPr lang="en-US" sz="1200" dirty="0">
+                <a:solidFill>
+                  <a:srgbClr val="000000"/>
+                </a:solidFill>
+                <a:latin typeface="Ubuntu"/>
+              </a:rPr>
+              <a:t>2.	</a:t>
+            </a:r>
             <a:r>
               <a:rPr lang="en-US" sz="1200" dirty="0">
                 <a:solidFill>
@@ -14148,9 +14212,17 @@
           </a:p>
           <a:p>
             <a:pPr marL="685800" indent="-177800" lvl="2">
-              <a:buFont typeface="+mj-lt"/>
-              <a:buAutoNum type="arabicPeriod"/>
+              <a:buNone/>
             </a:pPr>
+            <a:r>
+              <a:rPr lang="en-US" sz="1200" dirty="0">
+                <a:solidFill>
+                  <a:srgbClr val="000000"/>
+                </a:solidFill>
+                <a:latin typeface="Ubuntu"/>
+              </a:rPr>
+              <a:t>3.	</a:t>
+            </a:r>
             <a:r>
               <a:rPr lang="en-US" sz="1200" dirty="0">
                 <a:solidFill>
@@ -14164,9 +14236,17 @@
           </a:p>
           <a:p>
             <a:pPr marL="228600" indent="-177800">
-              <a:buFont typeface="+mj-lt"/>
-              <a:buAutoNum type="arabicPeriod"/>
+              <a:buNone/>
             </a:pPr>
+            <a:r>
+              <a:rPr lang="en-US" sz="1200" dirty="0">
+                <a:solidFill>
+                  <a:srgbClr val="000000"/>
+                </a:solidFill>
+                <a:latin typeface="Ubuntu"/>
+              </a:rPr>
+              <a:t>2.	</a:t>
+            </a:r>
             <a:r>
               <a:rPr lang="en-US" sz="1200" dirty="0">
                 <a:solidFill>
@@ -14348,9 +14428,17 @@
           </a:p>
           <a:p>
             <a:pPr marL="228600" indent="-177800">
-              <a:buFont typeface="+mj-lt"/>
-              <a:buAutoNum type="arabicPeriod"/>
+              <a:buNone/>
             </a:pPr>
+            <a:r>
+              <a:rPr lang="en-US" sz="1200" dirty="0">
+                <a:solidFill>
+                  <a:srgbClr val="000000"/>
+                </a:solidFill>
+                <a:latin typeface="Ubuntu"/>
+              </a:rPr>
+              <a:t>i.	</a:t>
+            </a:r>
             <a:r>
               <a:rPr lang="en-US" sz="1200" dirty="0">
                 <a:solidFill>
@@ -14364,9 +14452,17 @@
           </a:p>
           <a:p>
             <a:pPr marL="228600" indent="-177800">
-              <a:buFont typeface="+mj-lt"/>
-              <a:buAutoNum type="arabicPeriod"/>
+              <a:buNone/>
             </a:pPr>
+            <a:r>
+              <a:rPr lang="en-US" sz="1200" dirty="0">
+                <a:solidFill>
+                  <a:srgbClr val="000000"/>
+                </a:solidFill>
+                <a:latin typeface="Ubuntu"/>
+              </a:rPr>
+              <a:t>ii.	</a:t>
+            </a:r>
             <a:r>
               <a:rPr lang="en-US" sz="1200" dirty="0">
                 <a:solidFill>
@@ -14395,9 +14491,17 @@
           </a:p>
           <a:p>
             <a:pPr marL="228600" indent="-177800">
-              <a:buFont typeface="+mj-lt"/>
-              <a:buAutoNum type="arabicPeriod"/>
+              <a:buNone/>
             </a:pPr>
+            <a:r>
+              <a:rPr lang="en-US" sz="1200" dirty="0">
+                <a:solidFill>
+                  <a:srgbClr val="000000"/>
+                </a:solidFill>
+                <a:latin typeface="Ubuntu"/>
+              </a:rPr>
+              <a:t>iii.	</a:t>
+            </a:r>
             <a:r>
               <a:rPr lang="en-US" sz="1200" dirty="0">
                 <a:solidFill>
@@ -14411,9 +14515,17 @@
           </a:p>
           <a:p>
             <a:pPr marL="228600" indent="-177800">
-              <a:buFont typeface="+mj-lt"/>
-              <a:buAutoNum type="arabicPeriod"/>
+              <a:buNone/>
             </a:pPr>
+            <a:r>
+              <a:rPr lang="en-US" sz="1200" dirty="0">
+                <a:solidFill>
+                  <a:srgbClr val="000000"/>
+                </a:solidFill>
+                <a:latin typeface="Ubuntu"/>
+              </a:rPr>
+              <a:t>iv.	</a:t>
+            </a:r>
             <a:r>
               <a:rPr lang="en-US" sz="1200" dirty="0">
                 <a:solidFill>

--- a/test/generator/baseline/gen.odp.to.pptx.pptx
+++ b/test/generator/baseline/gen.odp.to.pptx.pptx
@@ -13771,8 +13771,8 @@
         </p:blipFill>
         <p:spPr>
           <a:xfrm>
-            <a:off x="4059428" y="1323086"/>
-            <a:ext cx="3574542" cy="3574542"/>
+            <a:off x="4059428" y="1307592"/>
+            <a:ext cx="3574542" cy="3605530"/>
           </a:xfrm>
           <a:prstGeom prst="rect">
             <a:avLst/>

--- a/test/generator/baseline/gen.odp.to.pptx.pptx
+++ b/test/generator/baseline/gen.odp.to.pptx.pptx
@@ -14635,7 +14635,134 @@
                 <a:gridCol w="2493818"/>
                 <a:gridCol w="1108364"/>
               </a:tblGrid>
-              <a:tr h="829310">
+              <a:tr h="691092">
+                <a:tc gridSpan="4">
+                  <a:txBody>
+                    <a:bodyPr/>
+                    <a:lstStyle/>
+                    <a:p>
+                      <a:pPr>
+                        <a:buNone/>
+                      </a:pPr>
+                      <a:r>
+                        <a:rPr lang="en-US" sz="1200" b="1" dirty="0"/>
+                        <a:t>Chart Title</a:t>
+                      </a:r>
+                      <a:endParaRPr lang="en-US" sz="1200" dirty="0"/>
+                    </a:p>
+                  </a:txBody>
+                  <a:tcPr>
+                    <a:lnL w="9525">
+                      <a:solidFill>
+                        <a:srgbClr val="BFBFBF"/>
+                      </a:solidFill>
+                    </a:lnL>
+                    <a:lnR w="9525">
+                      <a:solidFill>
+                        <a:srgbClr val="BFBFBF"/>
+                      </a:solidFill>
+                    </a:lnR>
+                    <a:lnT w="9525">
+                      <a:solidFill>
+                        <a:srgbClr val="BFBFBF"/>
+                      </a:solidFill>
+                    </a:lnT>
+                    <a:lnB w="9525">
+                      <a:solidFill>
+                        <a:srgbClr val="BFBFBF"/>
+                      </a:solidFill>
+                    </a:lnB>
+                  </a:tcPr>
+                </a:tc>
+                <a:tc hMerge="1">
+                  <a:txBody>
+                    <a:bodyPr/>
+                    <a:lstStyle/>
+                    <a:p/>
+                  </a:txBody>
+                  <a:tcPr>
+                    <a:lnL w="9525">
+                      <a:solidFill>
+                        <a:srgbClr val="BFBFBF"/>
+                      </a:solidFill>
+                    </a:lnL>
+                    <a:lnR w="9525">
+                      <a:solidFill>
+                        <a:srgbClr val="BFBFBF"/>
+                      </a:solidFill>
+                    </a:lnR>
+                    <a:lnT w="9525">
+                      <a:solidFill>
+                        <a:srgbClr val="BFBFBF"/>
+                      </a:solidFill>
+                    </a:lnT>
+                    <a:lnB w="9525">
+                      <a:solidFill>
+                        <a:srgbClr val="BFBFBF"/>
+                      </a:solidFill>
+                    </a:lnB>
+                  </a:tcPr>
+                </a:tc>
+                <a:tc hMerge="1">
+                  <a:txBody>
+                    <a:bodyPr/>
+                    <a:lstStyle/>
+                    <a:p/>
+                  </a:txBody>
+                  <a:tcPr>
+                    <a:lnL w="9525">
+                      <a:solidFill>
+                        <a:srgbClr val="BFBFBF"/>
+                      </a:solidFill>
+                    </a:lnL>
+                    <a:lnR w="9525">
+                      <a:solidFill>
+                        <a:srgbClr val="BFBFBF"/>
+                      </a:solidFill>
+                    </a:lnR>
+                    <a:lnT w="9525">
+                      <a:solidFill>
+                        <a:srgbClr val="BFBFBF"/>
+                      </a:solidFill>
+                    </a:lnT>
+                    <a:lnB w="9525">
+                      <a:solidFill>
+                        <a:srgbClr val="BFBFBF"/>
+                      </a:solidFill>
+                    </a:lnB>
+                  </a:tcPr>
+                </a:tc>
+                <a:tc hMerge="1">
+                  <a:txBody>
+                    <a:bodyPr/>
+                    <a:lstStyle/>
+                    <a:p/>
+                  </a:txBody>
+                  <a:tcPr>
+                    <a:lnL w="9525">
+                      <a:solidFill>
+                        <a:srgbClr val="BFBFBF"/>
+                      </a:solidFill>
+                    </a:lnL>
+                    <a:lnR w="9525">
+                      <a:solidFill>
+                        <a:srgbClr val="BFBFBF"/>
+                      </a:solidFill>
+                    </a:lnR>
+                    <a:lnT w="9525">
+                      <a:solidFill>
+                        <a:srgbClr val="BFBFBF"/>
+                      </a:solidFill>
+                    </a:lnT>
+                    <a:lnB w="9525">
+                      <a:solidFill>
+                        <a:srgbClr val="BFBFBF"/>
+                      </a:solidFill>
+                    </a:lnB>
+                  </a:tcPr>
+                </a:tc>
+              </a:tr>
+              <a:tr h="691092">
                 <a:tc>
                   <a:txBody>
                     <a:bodyPr/>
@@ -14785,7 +14912,7 @@
                   </a:tcPr>
                 </a:tc>
               </a:tr>
-              <a:tr h="829310">
+              <a:tr h="691092">
                 <a:tc>
                   <a:txBody>
                     <a:bodyPr/>
@@ -14939,7 +15066,7 @@
                   </a:tcPr>
                 </a:tc>
               </a:tr>
-              <a:tr h="829310">
+              <a:tr h="691092">
                 <a:tc>
                   <a:txBody>
                     <a:bodyPr/>
@@ -15093,7 +15220,7 @@
                   </a:tcPr>
                 </a:tc>
               </a:tr>
-              <a:tr h="829310">
+              <a:tr h="691092">
                 <a:tc>
                   <a:txBody>
                     <a:bodyPr/>
@@ -15247,7 +15374,7 @@
                   </a:tcPr>
                 </a:tc>
               </a:tr>
-              <a:tr h="829310">
+              <a:tr h="691092">
                 <a:tc>
                   <a:txBody>
                     <a:bodyPr/>
